--- a/docs/presentation/Pivoine-Lilas.pptx
+++ b/docs/presentation/Pivoine-Lilas.pptx
@@ -27,6 +27,8 @@
     <p:sldId id="275" r:id="rId26"/>
     <p:sldId id="276" r:id="rId27"/>
     <p:sldId id="277" r:id="rId28"/>
+    <p:sldId id="278" r:id="rId29"/>
+    <p:sldId id="279" r:id="rId30"/>
   </p:sldIdLst>
   <p:sldSz cx="12191695" cy="6858000" type="screen4x3"/>
   <p:notesSz cx="6858000" cy="9144000"/>
@@ -3621,533 +3623,30 @@
           </a:p>
         </p:txBody>
       </p:sp>
-      <p:sp>
-        <p:nvSpPr>
-          <p:cNvPr id="8" name="Rounded Rectangle 7"/>
-          <p:cNvSpPr/>
-          <p:nvPr/>
-        </p:nvSpPr>
-        <p:spPr>
-          <a:xfrm>
-            <a:off x="365760" y="1143000"/>
-            <a:ext cx="2743200" cy="2286000"/>
-          </a:xfrm>
-          <a:prstGeom prst="roundRect">
-            <a:avLst/>
-          </a:prstGeom>
-          <a:solidFill>
-            <a:srgbClr val="FFFFFF"/>
-          </a:solidFill>
-          <a:ln>
-            <a:solidFill>
-              <a:srgbClr val="BC6288"/>
-            </a:solidFill>
-          </a:ln>
-        </p:spPr>
-        <p:style>
-          <a:lnRef idx="1">
-            <a:schemeClr val="accent1"/>
-          </a:lnRef>
-          <a:fillRef idx="3">
-            <a:schemeClr val="accent1"/>
-          </a:fillRef>
-          <a:effectRef idx="2">
-            <a:schemeClr val="accent1"/>
-          </a:effectRef>
-          <a:fontRef idx="minor">
-            <a:schemeClr val="lt1"/>
-          </a:fontRef>
-        </p:style>
-        <p:txBody>
-          <a:bodyPr rtlCol="0" anchor="ctr"/>
-          <a:lstStyle/>
-          <a:p>
-            <a:pPr algn="ctr"/>
-          </a:p>
-        </p:txBody>
-      </p:sp>
-      <p:sp>
-        <p:nvSpPr>
-          <p:cNvPr id="9" name="TextBox 8"/>
-          <p:cNvSpPr txBox="1"/>
-          <p:nvPr/>
-        </p:nvSpPr>
-        <p:spPr>
-          <a:xfrm>
-            <a:off x="475488" y="1216152"/>
-            <a:ext cx="2560320" cy="2176272"/>
-          </a:xfrm>
-          <a:prstGeom prst="rect">
-            <a:avLst/>
-          </a:prstGeom>
-          <a:noFill/>
-        </p:spPr>
-        <p:txBody>
-          <a:bodyPr wrap="square">
-            <a:spAutoFit/>
-          </a:bodyPr>
-          <a:lstStyle/>
-          <a:p>
-            <a:r>
-              <a:rPr b="1" sz="1400">
-                <a:solidFill>
-                  <a:srgbClr val="BC6288"/>
-                </a:solidFill>
-                <a:latin typeface="Calibri"/>
-              </a:rPr>
-              <a:t>1. Browser</a:t>
-            </a:r>
-          </a:p>
-          <a:p>
-            <a:pPr>
-              <a:defRPr sz="1200">
-                <a:solidFill>
-                  <a:srgbClr val="3A2A30"/>
-                </a:solidFill>
-                <a:latin typeface="Calibri"/>
-              </a:defRPr>
-            </a:pPr>
-            <a:r>
-              <a:t>Jinja pages</a:t>
-            </a:r>
-          </a:p>
-          <a:p>
-            <a:pPr>
-              <a:defRPr sz="1200">
-                <a:solidFill>
-                  <a:srgbClr val="3A2A30"/>
-                </a:solidFill>
-                <a:latin typeface="Calibri"/>
-              </a:defRPr>
-            </a:pPr>
-            <a:r>
-              <a:t>api.js / FloraCart</a:t>
-            </a:r>
-          </a:p>
-          <a:p>
-            <a:pPr>
-              <a:defRPr sz="1200">
-                <a:solidFill>
-                  <a:srgbClr val="3A2A30"/>
-                </a:solidFill>
-                <a:latin typeface="Calibri"/>
-              </a:defRPr>
-            </a:pPr>
-            <a:r>
-              <a:t>Bearer JSON</a:t>
-            </a:r>
-          </a:p>
-        </p:txBody>
-      </p:sp>
-      <p:sp>
-        <p:nvSpPr>
-          <p:cNvPr id="10" name="Rounded Rectangle 9"/>
-          <p:cNvSpPr/>
-          <p:nvPr/>
-        </p:nvSpPr>
-        <p:spPr>
-          <a:xfrm>
-            <a:off x="3246120" y="1143000"/>
-            <a:ext cx="2743200" cy="2286000"/>
-          </a:xfrm>
-          <a:prstGeom prst="roundRect">
-            <a:avLst/>
-          </a:prstGeom>
-          <a:solidFill>
-            <a:srgbClr val="FFFFFF"/>
-          </a:solidFill>
-          <a:ln>
-            <a:solidFill>
-              <a:srgbClr val="BC6288"/>
-            </a:solidFill>
-          </a:ln>
-        </p:spPr>
-        <p:style>
-          <a:lnRef idx="1">
-            <a:schemeClr val="accent1"/>
-          </a:lnRef>
-          <a:fillRef idx="3">
-            <a:schemeClr val="accent1"/>
-          </a:fillRef>
-          <a:effectRef idx="2">
-            <a:schemeClr val="accent1"/>
-          </a:effectRef>
-          <a:fontRef idx="minor">
-            <a:schemeClr val="lt1"/>
-          </a:fontRef>
-        </p:style>
-        <p:txBody>
-          <a:bodyPr rtlCol="0" anchor="ctr"/>
-          <a:lstStyle/>
-          <a:p>
-            <a:pPr algn="ctr"/>
-          </a:p>
-        </p:txBody>
-      </p:sp>
-      <p:sp>
-        <p:nvSpPr>
-          <p:cNvPr id="11" name="TextBox 10"/>
-          <p:cNvSpPr txBox="1"/>
-          <p:nvPr/>
-        </p:nvSpPr>
-        <p:spPr>
-          <a:xfrm>
-            <a:off x="3355848" y="1216152"/>
-            <a:ext cx="2560320" cy="2176272"/>
-          </a:xfrm>
-          <a:prstGeom prst="rect">
-            <a:avLst/>
-          </a:prstGeom>
-          <a:noFill/>
-        </p:spPr>
-        <p:txBody>
-          <a:bodyPr wrap="square">
-            <a:spAutoFit/>
-          </a:bodyPr>
-          <a:lstStyle/>
-          <a:p>
-            <a:r>
-              <a:rPr b="1" sz="1400">
-                <a:solidFill>
-                  <a:srgbClr val="BC6288"/>
-                </a:solidFill>
-                <a:latin typeface="Calibri"/>
-              </a:rPr>
-              <a:t>2. Flask</a:t>
-            </a:r>
-          </a:p>
-          <a:p>
-            <a:pPr>
-              <a:defRPr sz="1200">
-                <a:solidFill>
-                  <a:srgbClr val="3A2A30"/>
-                </a:solidFill>
-                <a:latin typeface="Calibri"/>
-              </a:defRPr>
-            </a:pPr>
-            <a:r>
-              <a:t>REST /api/v1</a:t>
-            </a:r>
-          </a:p>
-          <a:p>
-            <a:pPr>
-              <a:defRPr sz="1200">
-                <a:solidFill>
-                  <a:srgbClr val="3A2A30"/>
-                </a:solidFill>
-                <a:latin typeface="Calibri"/>
-              </a:defRPr>
-            </a:pPr>
-            <a:r>
-              <a:t>checkout_service</a:t>
-            </a:r>
-          </a:p>
-          <a:p>
-            <a:pPr>
-              <a:defRPr sz="1200">
-                <a:solidFill>
-                  <a:srgbClr val="3A2A30"/>
-                </a:solidFill>
-                <a:latin typeface="Calibri"/>
-              </a:defRPr>
-            </a:pPr>
-            <a:r>
-              <a:t>JWT + DB is_admin</a:t>
-            </a:r>
-          </a:p>
-        </p:txBody>
-      </p:sp>
-      <p:sp>
-        <p:nvSpPr>
-          <p:cNvPr id="12" name="Rounded Rectangle 11"/>
-          <p:cNvSpPr/>
-          <p:nvPr/>
-        </p:nvSpPr>
-        <p:spPr>
-          <a:xfrm>
-            <a:off x="6126480" y="1143000"/>
-            <a:ext cx="2743200" cy="2286000"/>
-          </a:xfrm>
-          <a:prstGeom prst="roundRect">
-            <a:avLst/>
-          </a:prstGeom>
-          <a:solidFill>
-            <a:srgbClr val="FFFFFF"/>
-          </a:solidFill>
-          <a:ln>
-            <a:solidFill>
-              <a:srgbClr val="BC6288"/>
-            </a:solidFill>
-          </a:ln>
-        </p:spPr>
-        <p:style>
-          <a:lnRef idx="1">
-            <a:schemeClr val="accent1"/>
-          </a:lnRef>
-          <a:fillRef idx="3">
-            <a:schemeClr val="accent1"/>
-          </a:fillRef>
-          <a:effectRef idx="2">
-            <a:schemeClr val="accent1"/>
-          </a:effectRef>
-          <a:fontRef idx="minor">
-            <a:schemeClr val="lt1"/>
-          </a:fontRef>
-        </p:style>
-        <p:txBody>
-          <a:bodyPr rtlCol="0" anchor="ctr"/>
-          <a:lstStyle/>
-          <a:p>
-            <a:pPr algn="ctr"/>
-          </a:p>
-        </p:txBody>
-      </p:sp>
-      <p:sp>
-        <p:nvSpPr>
-          <p:cNvPr id="13" name="TextBox 12"/>
-          <p:cNvSpPr txBox="1"/>
-          <p:nvPr/>
-        </p:nvSpPr>
-        <p:spPr>
-          <a:xfrm>
-            <a:off x="6236208" y="1216152"/>
-            <a:ext cx="2560320" cy="2176272"/>
-          </a:xfrm>
-          <a:prstGeom prst="rect">
-            <a:avLst/>
-          </a:prstGeom>
-          <a:noFill/>
-        </p:spPr>
-        <p:txBody>
-          <a:bodyPr wrap="square">
-            <a:spAutoFit/>
-          </a:bodyPr>
-          <a:lstStyle/>
-          <a:p>
-            <a:r>
-              <a:rPr b="1" sz="1400">
-                <a:solidFill>
-                  <a:srgbClr val="BC6288"/>
-                </a:solidFill>
-                <a:latin typeface="Calibri"/>
-              </a:rPr>
-              <a:t>3. Data</a:t>
-            </a:r>
-          </a:p>
-          <a:p>
-            <a:pPr>
-              <a:defRPr sz="1200">
-                <a:solidFill>
-                  <a:srgbClr val="3A2A30"/>
-                </a:solidFill>
-                <a:latin typeface="Calibri"/>
-              </a:defRPr>
-            </a:pPr>
-            <a:r>
-              <a:t>SQLite / Postgres</a:t>
-            </a:r>
-          </a:p>
-          <a:p>
-            <a:pPr>
-              <a:defRPr sz="1200">
-                <a:solidFill>
-                  <a:srgbClr val="3A2A30"/>
-                </a:solidFill>
-                <a:latin typeface="Calibri"/>
-              </a:defRPr>
-            </a:pPr>
-            <a:r>
-              <a:t>Numeric(10,2)</a:t>
-            </a:r>
-          </a:p>
-          <a:p>
-            <a:pPr>
-              <a:defRPr sz="1200">
-                <a:solidFill>
-                  <a:srgbClr val="3A2A30"/>
-                </a:solidFill>
-                <a:latin typeface="Calibri"/>
-              </a:defRPr>
-            </a:pPr>
-            <a:r>
-              <a:t>static photos</a:t>
-            </a:r>
-          </a:p>
-        </p:txBody>
-      </p:sp>
-      <p:sp>
-        <p:nvSpPr>
-          <p:cNvPr id="14" name="Rounded Rectangle 13"/>
-          <p:cNvSpPr/>
-          <p:nvPr/>
-        </p:nvSpPr>
-        <p:spPr>
-          <a:xfrm>
-            <a:off x="9006840" y="1143000"/>
-            <a:ext cx="2743200" cy="2286000"/>
-          </a:xfrm>
-          <a:prstGeom prst="roundRect">
-            <a:avLst/>
-          </a:prstGeom>
-          <a:solidFill>
-            <a:srgbClr val="FFFFFF"/>
-          </a:solidFill>
-          <a:ln>
-            <a:solidFill>
-              <a:srgbClr val="BC6288"/>
-            </a:solidFill>
-          </a:ln>
-        </p:spPr>
-        <p:style>
-          <a:lnRef idx="1">
-            <a:schemeClr val="accent1"/>
-          </a:lnRef>
-          <a:fillRef idx="3">
-            <a:schemeClr val="accent1"/>
-          </a:fillRef>
-          <a:effectRef idx="2">
-            <a:schemeClr val="accent1"/>
-          </a:effectRef>
-          <a:fontRef idx="minor">
-            <a:schemeClr val="lt1"/>
-          </a:fontRef>
-        </p:style>
-        <p:txBody>
-          <a:bodyPr rtlCol="0" anchor="ctr"/>
-          <a:lstStyle/>
-          <a:p>
-            <a:pPr algn="ctr"/>
-          </a:p>
-        </p:txBody>
-      </p:sp>
-      <p:sp>
-        <p:nvSpPr>
-          <p:cNvPr id="15" name="TextBox 14"/>
-          <p:cNvSpPr txBox="1"/>
-          <p:nvPr/>
-        </p:nvSpPr>
-        <p:spPr>
-          <a:xfrm>
-            <a:off x="9116567" y="1216152"/>
-            <a:ext cx="2560320" cy="2176272"/>
-          </a:xfrm>
-          <a:prstGeom prst="rect">
-            <a:avLst/>
-          </a:prstGeom>
-          <a:noFill/>
-        </p:spPr>
-        <p:txBody>
-          <a:bodyPr wrap="square">
-            <a:spAutoFit/>
-          </a:bodyPr>
-          <a:lstStyle/>
-          <a:p>
-            <a:r>
-              <a:rPr b="1" sz="1400">
-                <a:solidFill>
-                  <a:srgbClr val="BC6288"/>
-                </a:solidFill>
-                <a:latin typeface="Calibri"/>
-              </a:rPr>
-              <a:t>4. Pay</a:t>
-            </a:r>
-          </a:p>
-          <a:p>
-            <a:pPr>
-              <a:defRPr sz="1200">
-                <a:solidFill>
-                  <a:srgbClr val="3A2A30"/>
-                </a:solidFill>
-                <a:latin typeface="Calibri"/>
-              </a:defRPr>
-            </a:pPr>
-            <a:r>
-              <a:t>Test cards</a:t>
-            </a:r>
-          </a:p>
-          <a:p>
-            <a:pPr>
-              <a:defRPr sz="1200">
-                <a:solidFill>
-                  <a:srgbClr val="3A2A30"/>
-                </a:solidFill>
-                <a:latin typeface="Calibri"/>
-              </a:defRPr>
-            </a:pPr>
-            <a:r>
-              <a:t>or Stripe HTTPS</a:t>
-            </a:r>
-          </a:p>
-          <a:p>
-            <a:pPr>
-              <a:defRPr sz="1200">
-                <a:solidFill>
-                  <a:srgbClr val="3A2A30"/>
-                </a:solidFill>
-                <a:latin typeface="Calibri"/>
-              </a:defRPr>
-            </a:pPr>
-            <a:r>
-              <a:t>orders paid/deposit</a:t>
-            </a:r>
-          </a:p>
-        </p:txBody>
-      </p:sp>
-      <p:sp>
-        <p:nvSpPr>
-          <p:cNvPr id="16" name="TextBox 15"/>
-          <p:cNvSpPr txBox="1"/>
-          <p:nvPr/>
-        </p:nvSpPr>
-        <p:spPr>
-          <a:xfrm>
-            <a:off x="411480" y="3657600"/>
-            <a:ext cx="11338560" cy="5029200"/>
-          </a:xfrm>
-          <a:prstGeom prst="rect">
-            <a:avLst/>
-          </a:prstGeom>
-          <a:noFill/>
-        </p:spPr>
-        <p:txBody>
-          <a:bodyPr wrap="square">
-            <a:spAutoFit/>
-          </a:bodyPr>
-          <a:lstStyle/>
-          <a:p>
-            <a:pPr>
-              <a:spcAft>
-                <a:spcPts val="800"/>
-              </a:spcAft>
-              <a:defRPr sz="1600">
-                <a:solidFill>
-                  <a:srgbClr val="3A2A30"/>
-                </a:solidFill>
-                <a:latin typeface="Calibri"/>
-              </a:defRPr>
-            </a:pPr>
-            <a:r>
-              <a:t>Flow: HTTPS/HTTP JSON → Flask → SQL. Optional Stripe api.stripe.com. Backup = florashop.db or managed PostgreSQL.</a:t>
-            </a:r>
-          </a:p>
-          <a:p>
-            <a:pPr>
-              <a:spcAft>
-                <a:spcPts val="800"/>
-              </a:spcAft>
-              <a:defRPr sz="1600">
-                <a:solidFill>
-                  <a:srgbClr val="3A2A30"/>
-                </a:solidFill>
-                <a:latin typeface="Calibri"/>
-              </a:defRPr>
-            </a:pPr>
-            <a:r>
-              <a:t>POST /payments/checkout never uses a client price. payment_intent_id is refused here (owner JWT → /confirm-payment).</a:t>
-            </a:r>
-          </a:p>
-        </p:txBody>
-      </p:sp>
+      <p:pic>
+        <p:nvPicPr>
+          <p:cNvPr id="8" name="Picture 7" descr="architecture.png"/>
+          <p:cNvPicPr>
+            <a:picLocks noChangeAspect="1"/>
+          </p:cNvPicPr>
+          <p:nvPr/>
+        </p:nvPicPr>
+        <p:blipFill>
+          <a:blip r:embed="rId2"/>
+          <a:stretch>
+            <a:fillRect/>
+          </a:stretch>
+        </p:blipFill>
+        <p:spPr>
+          <a:xfrm>
+            <a:off x="411480" y="1051560"/>
+            <a:ext cx="11338560" cy="5349240"/>
+          </a:xfrm>
+          <a:prstGeom prst="rect">
+            <a:avLst/>
+          </a:prstGeom>
+        </p:spPr>
+      </p:pic>
     </p:spTree>
   </p:cSld>
   <p:clrMapOvr>
@@ -4397,441 +3896,30 @@
           </a:p>
         </p:txBody>
       </p:sp>
-      <p:graphicFrame>
-        <p:nvGraphicFramePr>
-          <p:cNvPr id="8" name="Table 7"/>
-          <p:cNvGraphicFramePr>
-            <a:graphicFrameLocks noGrp="1"/>
-          </p:cNvGraphicFramePr>
-          <p:nvPr/>
-        </p:nvGraphicFramePr>
-        <p:xfrm>
-          <a:off x="365760" y="1097280"/>
-          <a:ext cx="11430000" cy="4206240"/>
-        </p:xfrm>
-        <a:graphic>
-          <a:graphicData uri="http://schemas.openxmlformats.org/drawingml/2006/table">
-            <a:tbl>
-              <a:tblPr firstRow="1" bandRow="1">
-                <a:tableStyleId>{5C22544A-7EE6-4342-B048-85BDC9FD1C3A}</a:tableStyleId>
-              </a:tblPr>
-              <a:tblGrid>
-                <a:gridCol w="3810000"/>
-                <a:gridCol w="3810000"/>
-                <a:gridCol w="3810000"/>
-              </a:tblGrid>
-              <a:tr h="701040">
-                <a:tc>
-                  <a:txBody>
-                    <a:bodyPr/>
-                    <a:lstStyle/>
-                    <a:p>
-                      <a:pPr>
-                        <a:defRPr b="1" sz="1100">
-                          <a:solidFill>
-                            <a:srgbClr val="FFFFFF"/>
-                          </a:solidFill>
-                          <a:latin typeface="Calibri"/>
-                        </a:defRPr>
-                      </a:pPr>
-                      <a:r>
-                        <a:t>Table</a:t>
-                      </a:r>
-                    </a:p>
-                  </a:txBody>
-                  <a:tcPr>
-                    <a:solidFill>
-                      <a:srgbClr val="BC6288"/>
-                    </a:solidFill>
-                  </a:tcPr>
-                </a:tc>
-                <a:tc>
-                  <a:txBody>
-                    <a:bodyPr/>
-                    <a:lstStyle/>
-                    <a:p>
-                      <a:pPr>
-                        <a:defRPr b="1" sz="1100">
-                          <a:solidFill>
-                            <a:srgbClr val="FFFFFF"/>
-                          </a:solidFill>
-                          <a:latin typeface="Calibri"/>
-                        </a:defRPr>
-                      </a:pPr>
-                      <a:r>
-                        <a:t>PK / FK</a:t>
-                      </a:r>
-                    </a:p>
-                  </a:txBody>
-                  <a:tcPr>
-                    <a:solidFill>
-                      <a:srgbClr val="BC6288"/>
-                    </a:solidFill>
-                  </a:tcPr>
-                </a:tc>
-                <a:tc>
-                  <a:txBody>
-                    <a:bodyPr/>
-                    <a:lstStyle/>
-                    <a:p>
-                      <a:pPr>
-                        <a:defRPr b="1" sz="1100">
-                          <a:solidFill>
-                            <a:srgbClr val="FFFFFF"/>
-                          </a:solidFill>
-                          <a:latin typeface="Calibri"/>
-                        </a:defRPr>
-                      </a:pPr>
-                      <a:r>
-                        <a:t>Rule</a:t>
-                      </a:r>
-                    </a:p>
-                  </a:txBody>
-                  <a:tcPr>
-                    <a:solidFill>
-                      <a:srgbClr val="BC6288"/>
-                    </a:solidFill>
-                  </a:tcPr>
-                </a:tc>
-              </a:tr>
-              <a:tr h="701040">
-                <a:tc>
-                  <a:txBody>
-                    <a:bodyPr/>
-                    <a:lstStyle/>
-                    <a:p>
-                      <a:pPr>
-                        <a:defRPr sz="1100">
-                          <a:solidFill>
-                            <a:srgbClr val="3A2A30"/>
-                          </a:solidFill>
-                          <a:latin typeface="Calibri"/>
-                        </a:defRPr>
-                      </a:pPr>
-                      <a:r>
-                        <a:t>users</a:t>
-                      </a:r>
-                    </a:p>
-                  </a:txBody>
-                  <a:tcPr/>
-                </a:tc>
-                <a:tc>
-                  <a:txBody>
-                    <a:bodyPr/>
-                    <a:lstStyle/>
-                    <a:p>
-                      <a:pPr>
-                        <a:defRPr sz="1100">
-                          <a:solidFill>
-                            <a:srgbClr val="3A2A30"/>
-                          </a:solidFill>
-                          <a:latin typeface="Calibri"/>
-                        </a:defRPr>
-                      </a:pPr>
-                      <a:r>
-                        <a:t>id · email unique</a:t>
-                      </a:r>
-                    </a:p>
-                  </a:txBody>
-                  <a:tcPr/>
-                </a:tc>
-                <a:tc>
-                  <a:txBody>
-                    <a:bodyPr/>
-                    <a:lstStyle/>
-                    <a:p>
-                      <a:pPr>
-                        <a:defRPr sz="1100">
-                          <a:solidFill>
-                            <a:srgbClr val="3A2A30"/>
-                          </a:solidFill>
-                          <a:latin typeface="Calibri"/>
-                        </a:defRPr>
-                      </a:pPr>
-                      <a:r>
-                        <a:t>hash only · is_admin default false</a:t>
-                      </a:r>
-                    </a:p>
-                  </a:txBody>
-                  <a:tcPr/>
-                </a:tc>
-              </a:tr>
-              <a:tr h="701040">
-                <a:tc>
-                  <a:txBody>
-                    <a:bodyPr/>
-                    <a:lstStyle/>
-                    <a:p>
-                      <a:pPr>
-                        <a:defRPr sz="1100">
-                          <a:solidFill>
-                            <a:srgbClr val="3A2A30"/>
-                          </a:solidFill>
-                          <a:latin typeface="Calibri"/>
-                        </a:defRPr>
-                      </a:pPr>
-                      <a:r>
-                        <a:t>categories → products</a:t>
-                      </a:r>
-                    </a:p>
-                  </a:txBody>
-                  <a:tcPr>
-                    <a:solidFill>
-                      <a:srgbClr val="F8F5F2"/>
-                    </a:solidFill>
-                  </a:tcPr>
-                </a:tc>
-                <a:tc>
-                  <a:txBody>
-                    <a:bodyPr/>
-                    <a:lstStyle/>
-                    <a:p>
-                      <a:pPr>
-                        <a:defRPr sz="1100">
-                          <a:solidFill>
-                            <a:srgbClr val="3A2A30"/>
-                          </a:solidFill>
-                          <a:latin typeface="Calibri"/>
-                        </a:defRPr>
-                      </a:pPr>
-                      <a:r>
-                        <a:t>category_id</a:t>
-                      </a:r>
-                    </a:p>
-                  </a:txBody>
-                  <a:tcPr>
-                    <a:solidFill>
-                      <a:srgbClr val="F8F5F2"/>
-                    </a:solidFill>
-                  </a:tcPr>
-                </a:tc>
-                <a:tc>
-                  <a:txBody>
-                    <a:bodyPr/>
-                    <a:lstStyle/>
-                    <a:p>
-                      <a:pPr>
-                        <a:defRPr sz="1100">
-                          <a:solidFill>
-                            <a:srgbClr val="3A2A30"/>
-                          </a:solidFill>
-                          <a:latin typeface="Calibri"/>
-                        </a:defRPr>
-                      </a:pPr>
-                      <a:r>
-                        <a:t>price Numeric · color #rrggbb · image path</a:t>
-                      </a:r>
-                    </a:p>
-                  </a:txBody>
-                  <a:tcPr>
-                    <a:solidFill>
-                      <a:srgbClr val="F8F5F2"/>
-                    </a:solidFill>
-                  </a:tcPr>
-                </a:tc>
-              </a:tr>
-              <a:tr h="701040">
-                <a:tc>
-                  <a:txBody>
-                    <a:bodyPr/>
-                    <a:lstStyle/>
-                    <a:p>
-                      <a:pPr>
-                        <a:defRPr sz="1100">
-                          <a:solidFill>
-                            <a:srgbClr val="3A2A30"/>
-                          </a:solidFill>
-                          <a:latin typeface="Calibri"/>
-                        </a:defRPr>
-                      </a:pPr>
-                      <a:r>
-                        <a:t>orders → order_items</a:t>
-                      </a:r>
-                    </a:p>
-                  </a:txBody>
-                  <a:tcPr/>
-                </a:tc>
-                <a:tc>
-                  <a:txBody>
-                    <a:bodyPr/>
-                    <a:lstStyle/>
-                    <a:p>
-                      <a:pPr>
-                        <a:defRPr sz="1100">
-                          <a:solidFill>
-                            <a:srgbClr val="3A2A30"/>
-                          </a:solidFill>
-                          <a:latin typeface="Calibri"/>
-                        </a:defRPr>
-                      </a:pPr>
-                      <a:r>
-                        <a:t>user_id nullable</a:t>
-                      </a:r>
-                    </a:p>
-                  </a:txBody>
-                  <a:tcPr/>
-                </a:tc>
-                <a:tc>
-                  <a:txBody>
-                    <a:bodyPr/>
-                    <a:lstStyle/>
-                    <a:p>
-                      <a:pPr>
-                        <a:defRPr sz="1100">
-                          <a:solidFill>
-                            <a:srgbClr val="3A2A30"/>
-                          </a:solidFill>
-                          <a:latin typeface="Calibri"/>
-                        </a:defRPr>
-                      </a:pPr>
-                      <a:r>
-                        <a:t>deposit, status, prep, card_last4, no PAN</a:t>
-                      </a:r>
-                    </a:p>
-                  </a:txBody>
-                  <a:tcPr/>
-                </a:tc>
-              </a:tr>
-              <a:tr h="701040">
-                <a:tc>
-                  <a:txBody>
-                    <a:bodyPr/>
-                    <a:lstStyle/>
-                    <a:p>
-                      <a:pPr>
-                        <a:defRPr sz="1100">
-                          <a:solidFill>
-                            <a:srgbClr val="3A2A30"/>
-                          </a:solidFill>
-                          <a:latin typeface="Calibri"/>
-                        </a:defRPr>
-                      </a:pPr>
-                      <a:r>
-                        <a:t>shop_themes ↔ products</a:t>
-                      </a:r>
-                    </a:p>
-                  </a:txBody>
-                  <a:tcPr>
-                    <a:solidFill>
-                      <a:srgbClr val="F8F5F2"/>
-                    </a:solidFill>
-                  </a:tcPr>
-                </a:tc>
-                <a:tc>
-                  <a:txBody>
-                    <a:bodyPr/>
-                    <a:lstStyle/>
-                    <a:p>
-                      <a:pPr>
-                        <a:defRPr sz="1100">
-                          <a:solidFill>
-                            <a:srgbClr val="3A2A30"/>
-                          </a:solidFill>
-                          <a:latin typeface="Calibri"/>
-                        </a:defRPr>
-                      </a:pPr>
-                      <a:r>
-                        <a:t>theme_products</a:t>
-                      </a:r>
-                    </a:p>
-                  </a:txBody>
-                  <a:tcPr>
-                    <a:solidFill>
-                      <a:srgbClr val="F8F5F2"/>
-                    </a:solidFill>
-                  </a:tcPr>
-                </a:tc>
-                <a:tc>
-                  <a:txBody>
-                    <a:bodyPr/>
-                    <a:lstStyle/>
-                    <a:p>
-                      <a:pPr>
-                        <a:defRPr sz="1100">
-                          <a:solidFill>
-                            <a:srgbClr val="3A2A30"/>
-                          </a:solidFill>
-                          <a:latin typeface="Calibri"/>
-                        </a:defRPr>
-                      </a:pPr>
-                      <a:r>
-                        <a:t>vitrine one row season_id + theme_id</a:t>
-                      </a:r>
-                    </a:p>
-                  </a:txBody>
-                  <a:tcPr>
-                    <a:solidFill>
-                      <a:srgbClr val="F8F5F2"/>
-                    </a:solidFill>
-                  </a:tcPr>
-                </a:tc>
-              </a:tr>
-              <a:tr h="701040">
-                <a:tc>
-                  <a:txBody>
-                    <a:bodyPr/>
-                    <a:lstStyle/>
-                    <a:p>
-                      <a:pPr>
-                        <a:defRPr sz="1100">
-                          <a:solidFill>
-                            <a:srgbClr val="3A2A30"/>
-                          </a:solidFill>
-                          <a:latin typeface="Calibri"/>
-                        </a:defRPr>
-                      </a:pPr>
-                      <a:r>
-                        <a:t>reviews*, prices*</a:t>
-                      </a:r>
-                    </a:p>
-                  </a:txBody>
-                  <a:tcPr/>
-                </a:tc>
-                <a:tc>
-                  <a:txBody>
-                    <a:bodyPr/>
-                    <a:lstStyle/>
-                    <a:p>
-                      <a:pPr>
-                        <a:defRPr sz="1100">
-                          <a:solidFill>
-                            <a:srgbClr val="3A2A30"/>
-                          </a:solidFill>
-                          <a:latin typeface="Calibri"/>
-                        </a:defRPr>
-                      </a:pPr>
-                      <a:r>
-                        <a:t>leftovers</a:t>
-                      </a:r>
-                    </a:p>
-                  </a:txBody>
-                  <a:tcPr/>
-                </a:tc>
-                <a:tc>
-                  <a:txBody>
-                    <a:bodyPr/>
-                    <a:lstStyle/>
-                    <a:p>
-                      <a:pPr>
-                        <a:defRPr sz="1100">
-                          <a:solidFill>
-                            <a:srgbClr val="3A2A30"/>
-                          </a:solidFill>
-                          <a:latin typeface="Calibri"/>
-                        </a:defRPr>
-                      </a:pPr>
-                      <a:r>
-                        <a:t>not on the purchase path</a:t>
-                      </a:r>
-                    </a:p>
-                  </a:txBody>
-                  <a:tcPr/>
-                </a:tc>
-              </a:tr>
-            </a:tbl>
-          </a:graphicData>
-        </a:graphic>
-      </p:graphicFrame>
+      <p:pic>
+        <p:nvPicPr>
+          <p:cNvPr id="8" name="Picture 7" descr="erd.png"/>
+          <p:cNvPicPr>
+            <a:picLocks noChangeAspect="1"/>
+          </p:cNvPicPr>
+          <p:nvPr/>
+        </p:nvPicPr>
+        <p:blipFill>
+          <a:blip r:embed="rId2"/>
+          <a:stretch>
+            <a:fillRect/>
+          </a:stretch>
+        </p:blipFill>
+        <p:spPr>
+          <a:xfrm>
+            <a:off x="3566160" y="1005840"/>
+            <a:ext cx="5029200" cy="5440680"/>
+          </a:xfrm>
+          <a:prstGeom prst="rect">
+            <a:avLst/>
+          </a:prstGeom>
+        </p:spPr>
+      </p:pic>
     </p:spTree>
   </p:cSld>
   <p:clrMapOvr>
@@ -9494,7 +8582,7 @@
                 </a:solidFill>
                 <a:latin typeface="Calibri"/>
               </a:rPr>
-              <a:t>MOCKUPS = THE LIVE UI</a:t>
+              <a:t>MAQUETTE</a:t>
             </a:r>
           </a:p>
         </p:txBody>
@@ -9528,14 +8616,14 @@
                 </a:solidFill>
                 <a:latin typeface="Calibri"/>
               </a:rPr>
-              <a:t>Same palette, real data</a:t>
+              <a:t>Desktop — palette, accueil, shop, paiement</a:t>
             </a:r>
           </a:p>
         </p:txBody>
       </p:sp>
       <p:pic>
         <p:nvPicPr>
-          <p:cNvPr id="8" name="Picture 7" descr="accueil.png"/>
+          <p:cNvPr id="8" name="Picture 7" descr="mockup-palette.png"/>
           <p:cNvPicPr>
             <a:picLocks noChangeAspect="1"/>
           </p:cNvPicPr>
@@ -9549,8 +8637,8 @@
         </p:blipFill>
         <p:spPr>
           <a:xfrm>
-            <a:off x="365760" y="1143000"/>
-            <a:ext cx="2697480" cy="4023360"/>
+            <a:off x="320040" y="1097280"/>
+            <a:ext cx="2743200" cy="3977639"/>
           </a:xfrm>
           <a:prstGeom prst="rect">
             <a:avLst/>
@@ -9565,8 +8653,8 @@
         </p:nvSpPr>
         <p:spPr>
           <a:xfrm>
-            <a:off x="365760" y="5212080"/>
-            <a:ext cx="2697480" cy="320040"/>
+            <a:off x="320040" y="5120640"/>
+            <a:ext cx="2743200" cy="292608"/>
           </a:xfrm>
           <a:prstGeom prst="rect">
             <a:avLst/>
@@ -9585,15 +8673,16 @@
                 <a:solidFill>
                   <a:srgbClr val="BC6288"/>
                 </a:solidFill>
+                <a:latin typeface="Calibri"/>
               </a:rPr>
-              <a:t>Home</a:t>
+              <a:t>Système visuel</a:t>
             </a:r>
           </a:p>
         </p:txBody>
       </p:sp>
       <p:pic>
         <p:nvPicPr>
-          <p:cNvPr id="10" name="Picture 9" descr="shop.jpg"/>
+          <p:cNvPr id="10" name="Picture 9" descr="mockup-accueil.png"/>
           <p:cNvPicPr>
             <a:picLocks noChangeAspect="1"/>
           </p:cNvPicPr>
@@ -9607,8 +8696,8 @@
         </p:blipFill>
         <p:spPr>
           <a:xfrm>
-            <a:off x="3246120" y="1143000"/>
-            <a:ext cx="2697480" cy="4023360"/>
+            <a:off x="3246120" y="1097280"/>
+            <a:ext cx="2743200" cy="3977639"/>
           </a:xfrm>
           <a:prstGeom prst="rect">
             <a:avLst/>
@@ -9623,8 +8712,8 @@
         </p:nvSpPr>
         <p:spPr>
           <a:xfrm>
-            <a:off x="3246120" y="5212080"/>
-            <a:ext cx="2697480" cy="320040"/>
+            <a:off x="3246120" y="5120640"/>
+            <a:ext cx="2743200" cy="292608"/>
           </a:xfrm>
           <a:prstGeom prst="rect">
             <a:avLst/>
@@ -9643,15 +8732,16 @@
                 <a:solidFill>
                   <a:srgbClr val="BC6288"/>
                 </a:solidFill>
+                <a:latin typeface="Calibri"/>
               </a:rPr>
-              <a:t>Shop</a:t>
+              <a:t>Accueil</a:t>
             </a:r>
           </a:p>
         </p:txBody>
       </p:sp>
       <p:pic>
         <p:nvPicPr>
-          <p:cNvPr id="12" name="Picture 11" descr="checkout.png"/>
+          <p:cNvPr id="12" name="Picture 11" descr="mockup-shop.png"/>
           <p:cNvPicPr>
             <a:picLocks noChangeAspect="1"/>
           </p:cNvPicPr>
@@ -9665,8 +8755,8 @@
         </p:blipFill>
         <p:spPr>
           <a:xfrm>
-            <a:off x="6126480" y="1143000"/>
-            <a:ext cx="2697480" cy="4023360"/>
+            <a:off x="6172200" y="1097280"/>
+            <a:ext cx="2743200" cy="3977639"/>
           </a:xfrm>
           <a:prstGeom prst="rect">
             <a:avLst/>
@@ -9681,8 +8771,8 @@
         </p:nvSpPr>
         <p:spPr>
           <a:xfrm>
-            <a:off x="6126480" y="5212080"/>
-            <a:ext cx="2697480" cy="320040"/>
+            <a:off x="6172200" y="5120640"/>
+            <a:ext cx="2743200" cy="292608"/>
           </a:xfrm>
           <a:prstGeom prst="rect">
             <a:avLst/>
@@ -9701,15 +8791,16 @@
                 <a:solidFill>
                   <a:srgbClr val="BC6288"/>
                 </a:solidFill>
+                <a:latin typeface="Calibri"/>
               </a:rPr>
-              <a:t>Checkout</a:t>
+              <a:t>Shop</a:t>
             </a:r>
           </a:p>
         </p:txBody>
       </p:sp>
       <p:pic>
         <p:nvPicPr>
-          <p:cNvPr id="14" name="Picture 13" descr="admin-orders.png"/>
+          <p:cNvPr id="14" name="Picture 13" descr="mockup-checkout.png"/>
           <p:cNvPicPr>
             <a:picLocks noChangeAspect="1"/>
           </p:cNvPicPr>
@@ -9723,8 +8814,8 @@
         </p:blipFill>
         <p:spPr>
           <a:xfrm>
-            <a:off x="9006840" y="1143000"/>
-            <a:ext cx="2697480" cy="4023360"/>
+            <a:off x="9098280" y="1097280"/>
+            <a:ext cx="2743200" cy="3977639"/>
           </a:xfrm>
           <a:prstGeom prst="rect">
             <a:avLst/>
@@ -9739,8 +8830,8 @@
         </p:nvSpPr>
         <p:spPr>
           <a:xfrm>
-            <a:off x="9006840" y="5212080"/>
-            <a:ext cx="2697480" cy="320040"/>
+            <a:off x="9098280" y="5120640"/>
+            <a:ext cx="2743200" cy="292608"/>
           </a:xfrm>
           <a:prstGeom prst="rect">
             <a:avLst/>
@@ -9759,8 +8850,9 @@
                 <a:solidFill>
                   <a:srgbClr val="BC6288"/>
                 </a:solidFill>
+                <a:latin typeface="Calibri"/>
               </a:rPr>
-              <a:t>Admin FAC</a:t>
+              <a:t>Paiement</a:t>
             </a:r>
           </a:p>
         </p:txBody>
@@ -9975,7 +9067,7 @@
                 </a:solidFill>
                 <a:latin typeface="Calibri"/>
               </a:rPr>
-              <a:t>CONCLUSION</a:t>
+              <a:t>MAQUETTE</a:t>
             </a:r>
           </a:p>
         </p:txBody>
@@ -10009,21 +9101,45 @@
                 </a:solidFill>
                 <a:latin typeface="Calibri"/>
               </a:rPr>
-              <a:t>A florist shop that takes money and can be explained</a:t>
-            </a:r>
-          </a:p>
-        </p:txBody>
-      </p:sp>
-      <p:sp>
-        <p:nvSpPr>
-          <p:cNvPr id="8" name="TextBox 7"/>
+              <a:t>Panier, commandes, admin FAC, mobile</a:t>
+            </a:r>
+          </a:p>
+        </p:txBody>
+      </p:sp>
+      <p:pic>
+        <p:nvPicPr>
+          <p:cNvPr id="8" name="Picture 7" descr="mockup-panier.png"/>
+          <p:cNvPicPr>
+            <a:picLocks noChangeAspect="1"/>
+          </p:cNvPicPr>
+          <p:nvPr/>
+        </p:nvPicPr>
+        <p:blipFill>
+          <a:blip r:embed="rId2"/>
+          <a:stretch>
+            <a:fillRect/>
+          </a:stretch>
+        </p:blipFill>
+        <p:spPr>
+          <a:xfrm>
+            <a:off x="320040" y="1097280"/>
+            <a:ext cx="2743200" cy="3977639"/>
+          </a:xfrm>
+          <a:prstGeom prst="rect">
+            <a:avLst/>
+          </a:prstGeom>
+        </p:spPr>
+      </p:pic>
+      <p:sp>
+        <p:nvSpPr>
+          <p:cNvPr id="9" name="TextBox 8"/>
           <p:cNvSpPr txBox="1"/>
           <p:nvPr/>
         </p:nvSpPr>
         <p:spPr>
           <a:xfrm>
-            <a:off x="411480" y="1097280"/>
-            <a:ext cx="11338560" cy="5029200"/>
+            <a:off x="320040" y="5120640"/>
+            <a:ext cx="2743200" cy="292608"/>
           </a:xfrm>
           <a:prstGeom prst="rect">
             <a:avLst/>
@@ -10031,72 +9147,197 @@
           <a:noFill/>
         </p:spPr>
         <p:txBody>
-          <a:bodyPr wrap="square">
+          <a:bodyPr wrap="none">
             <a:spAutoFit/>
           </a:bodyPr>
           <a:lstStyle/>
           <a:p>
-            <a:pPr>
-              <a:spcAft>
-                <a:spcPts val="800"/>
-              </a:spcAft>
-              <a:defRPr sz="1800">
-                <a:solidFill>
-                  <a:srgbClr val="3A2A30"/>
-                </a:solidFill>
-                <a:latin typeface="Calibri"/>
-              </a:defRPr>
-            </a:pPr>
-            <a:r>
-              <a:t>A customer can sign in, buy a photographed bouquet, pay or leave a deposit, subscribe, and track.</a:t>
-            </a:r>
-          </a:p>
-          <a:p>
-            <a:pPr>
-              <a:spcAft>
-                <a:spcPts val="800"/>
-              </a:spcAft>
-              <a:defRPr sz="1800">
-                <a:solidFill>
-                  <a:srgbClr val="3A2A30"/>
-                </a:solidFill>
-                <a:latin typeface="Calibri"/>
-              </a:defRPr>
-            </a:pPr>
-            <a:r>
-              <a:t>The florist manages catalog, vitrine, and a printable TTC invoice — not a fake 20 % TVA.</a:t>
-            </a:r>
-          </a:p>
-          <a:p>
-            <a:pPr>
-              <a:spcAft>
-                <a:spcPts val="800"/>
-              </a:spcAft>
-              <a:defRPr sz="1800">
-                <a:solidFill>
-                  <a:srgbClr val="3A2A30"/>
-                </a:solidFill>
-                <a:latin typeface="Calibri"/>
-              </a:defRPr>
-            </a:pPr>
-            <a:r>
-              <a:t>Gaps from the original Wix spec are written down. 80 tests. Secrets stay out of Git.</a:t>
-            </a:r>
-          </a:p>
-          <a:p>
-            <a:pPr>
-              <a:spcAft>
-                <a:spcPts val="800"/>
-              </a:spcAft>
-              <a:defRPr sz="1800">
-                <a:solidFill>
-                  <a:srgbClr val="3A2A30"/>
-                </a:solidFill>
-                <a:latin typeface="Calibri"/>
-              </a:defRPr>
-            </a:pPr>
-            <a:r>
-              <a:t>Next slice: operations (delivery, email, hosting), not another visual pass.</a:t>
+            <a:pPr algn="ctr"/>
+            <a:r>
+              <a:rPr sz="1200" b="1">
+                <a:solidFill>
+                  <a:srgbClr val="BC6288"/>
+                </a:solidFill>
+                <a:latin typeface="Calibri"/>
+              </a:rPr>
+              <a:t>Panier</a:t>
+            </a:r>
+          </a:p>
+        </p:txBody>
+      </p:sp>
+      <p:pic>
+        <p:nvPicPr>
+          <p:cNvPr id="10" name="Picture 9" descr="mockup-commandes.png"/>
+          <p:cNvPicPr>
+            <a:picLocks noChangeAspect="1"/>
+          </p:cNvPicPr>
+          <p:nvPr/>
+        </p:nvPicPr>
+        <p:blipFill>
+          <a:blip r:embed="rId3"/>
+          <a:stretch>
+            <a:fillRect/>
+          </a:stretch>
+        </p:blipFill>
+        <p:spPr>
+          <a:xfrm>
+            <a:off x="3246120" y="1097280"/>
+            <a:ext cx="2743200" cy="3977639"/>
+          </a:xfrm>
+          <a:prstGeom prst="rect">
+            <a:avLst/>
+          </a:prstGeom>
+        </p:spPr>
+      </p:pic>
+      <p:sp>
+        <p:nvSpPr>
+          <p:cNvPr id="11" name="TextBox 10"/>
+          <p:cNvSpPr txBox="1"/>
+          <p:nvPr/>
+        </p:nvSpPr>
+        <p:spPr>
+          <a:xfrm>
+            <a:off x="3246120" y="5120640"/>
+            <a:ext cx="2743200" cy="292608"/>
+          </a:xfrm>
+          <a:prstGeom prst="rect">
+            <a:avLst/>
+          </a:prstGeom>
+          <a:noFill/>
+        </p:spPr>
+        <p:txBody>
+          <a:bodyPr wrap="none">
+            <a:spAutoFit/>
+          </a:bodyPr>
+          <a:lstStyle/>
+          <a:p>
+            <a:pPr algn="ctr"/>
+            <a:r>
+              <a:rPr sz="1200" b="1">
+                <a:solidFill>
+                  <a:srgbClr val="BC6288"/>
+                </a:solidFill>
+                <a:latin typeface="Calibri"/>
+              </a:rPr>
+              <a:t>Mes commandes</a:t>
+            </a:r>
+          </a:p>
+        </p:txBody>
+      </p:sp>
+      <p:pic>
+        <p:nvPicPr>
+          <p:cNvPr id="12" name="Picture 11" descr="mockup-admin-facture.png"/>
+          <p:cNvPicPr>
+            <a:picLocks noChangeAspect="1"/>
+          </p:cNvPicPr>
+          <p:nvPr/>
+        </p:nvPicPr>
+        <p:blipFill>
+          <a:blip r:embed="rId4"/>
+          <a:stretch>
+            <a:fillRect/>
+          </a:stretch>
+        </p:blipFill>
+        <p:spPr>
+          <a:xfrm>
+            <a:off x="6172200" y="1097280"/>
+            <a:ext cx="2743200" cy="3977639"/>
+          </a:xfrm>
+          <a:prstGeom prst="rect">
+            <a:avLst/>
+          </a:prstGeom>
+        </p:spPr>
+      </p:pic>
+      <p:sp>
+        <p:nvSpPr>
+          <p:cNvPr id="13" name="TextBox 12"/>
+          <p:cNvSpPr txBox="1"/>
+          <p:nvPr/>
+        </p:nvSpPr>
+        <p:spPr>
+          <a:xfrm>
+            <a:off x="6172200" y="5120640"/>
+            <a:ext cx="2743200" cy="292608"/>
+          </a:xfrm>
+          <a:prstGeom prst="rect">
+            <a:avLst/>
+          </a:prstGeom>
+          <a:noFill/>
+        </p:spPr>
+        <p:txBody>
+          <a:bodyPr wrap="none">
+            <a:spAutoFit/>
+          </a:bodyPr>
+          <a:lstStyle/>
+          <a:p>
+            <a:pPr algn="ctr"/>
+            <a:r>
+              <a:rPr sz="1200" b="1">
+                <a:solidFill>
+                  <a:srgbClr val="BC6288"/>
+                </a:solidFill>
+                <a:latin typeface="Calibri"/>
+              </a:rPr>
+              <a:t>Facture FAC</a:t>
+            </a:r>
+          </a:p>
+        </p:txBody>
+      </p:sp>
+      <p:pic>
+        <p:nvPicPr>
+          <p:cNvPr id="14" name="Picture 13" descr="mockup-shop-mobile.png"/>
+          <p:cNvPicPr>
+            <a:picLocks noChangeAspect="1"/>
+          </p:cNvPicPr>
+          <p:nvPr/>
+        </p:nvPicPr>
+        <p:blipFill>
+          <a:blip r:embed="rId5"/>
+          <a:stretch>
+            <a:fillRect/>
+          </a:stretch>
+        </p:blipFill>
+        <p:spPr>
+          <a:xfrm>
+            <a:off x="9189720" y="1051560"/>
+            <a:ext cx="2606040" cy="4617720"/>
+          </a:xfrm>
+          <a:prstGeom prst="rect">
+            <a:avLst/>
+          </a:prstGeom>
+        </p:spPr>
+      </p:pic>
+      <p:sp>
+        <p:nvSpPr>
+          <p:cNvPr id="15" name="TextBox 14"/>
+          <p:cNvSpPr txBox="1"/>
+          <p:nvPr/>
+        </p:nvSpPr>
+        <p:spPr>
+          <a:xfrm>
+            <a:off x="9189720" y="5687568"/>
+            <a:ext cx="2606040" cy="292608"/>
+          </a:xfrm>
+          <a:prstGeom prst="rect">
+            <a:avLst/>
+          </a:prstGeom>
+          <a:noFill/>
+        </p:spPr>
+        <p:txBody>
+          <a:bodyPr wrap="none">
+            <a:spAutoFit/>
+          </a:bodyPr>
+          <a:lstStyle/>
+          <a:p>
+            <a:pPr algn="ctr"/>
+            <a:r>
+              <a:rPr sz="1200" b="1">
+                <a:solidFill>
+                  <a:srgbClr val="BC6288"/>
+                </a:solidFill>
+                <a:latin typeface="Calibri"/>
+              </a:rPr>
+              <a:t>Shop mobile</a:t>
             </a:r>
           </a:p>
         </p:txBody>
@@ -10110,6 +9351,768 @@
 </file>
 
 <file path=ppt/slides/slide22.xml><?xml version="1.0" encoding="utf-8"?>
+<p:sld xmlns:a="http://schemas.openxmlformats.org/drawingml/2006/main" xmlns:p="http://schemas.openxmlformats.org/presentationml/2006/main" xmlns:r="http://schemas.openxmlformats.org/officeDocument/2006/relationships">
+  <p:cSld>
+    <p:spTree>
+      <p:nvGrpSpPr>
+        <p:cNvPr id="1" name=""/>
+        <p:cNvGrpSpPr/>
+        <p:nvPr/>
+      </p:nvGrpSpPr>
+      <p:grpSpPr/>
+      <p:sp>
+        <p:nvSpPr>
+          <p:cNvPr id="2" name="Rectangle 1"/>
+          <p:cNvSpPr/>
+          <p:nvPr/>
+        </p:nvSpPr>
+        <p:spPr>
+          <a:xfrm>
+            <a:off x="0" y="0"/>
+            <a:ext cx="12191695" cy="6858000"/>
+          </a:xfrm>
+          <a:prstGeom prst="rect">
+            <a:avLst/>
+          </a:prstGeom>
+          <a:solidFill>
+            <a:srgbClr val="FDFAF8"/>
+          </a:solidFill>
+          <a:ln>
+            <a:noFill/>
+          </a:ln>
+        </p:spPr>
+        <p:style>
+          <a:lnRef idx="1">
+            <a:schemeClr val="accent1"/>
+          </a:lnRef>
+          <a:fillRef idx="3">
+            <a:schemeClr val="accent1"/>
+          </a:fillRef>
+          <a:effectRef idx="2">
+            <a:schemeClr val="accent1"/>
+          </a:effectRef>
+          <a:fontRef idx="minor">
+            <a:schemeClr val="lt1"/>
+          </a:fontRef>
+        </p:style>
+        <p:txBody>
+          <a:bodyPr rtlCol="0" anchor="ctr"/>
+          <a:lstStyle/>
+          <a:p>
+            <a:pPr algn="ctr"/>
+          </a:p>
+        </p:txBody>
+      </p:sp>
+      <p:sp>
+        <p:nvSpPr>
+          <p:cNvPr id="3" name="Rectangle 2"/>
+          <p:cNvSpPr/>
+          <p:nvPr/>
+        </p:nvSpPr>
+        <p:spPr>
+          <a:xfrm>
+            <a:off x="0" y="0"/>
+            <a:ext cx="12191695" cy="109728"/>
+          </a:xfrm>
+          <a:prstGeom prst="rect">
+            <a:avLst/>
+          </a:prstGeom>
+          <a:solidFill>
+            <a:srgbClr val="BC6288"/>
+          </a:solidFill>
+          <a:ln>
+            <a:noFill/>
+          </a:ln>
+        </p:spPr>
+        <p:style>
+          <a:lnRef idx="1">
+            <a:schemeClr val="accent1"/>
+          </a:lnRef>
+          <a:fillRef idx="3">
+            <a:schemeClr val="accent1"/>
+          </a:fillRef>
+          <a:effectRef idx="2">
+            <a:schemeClr val="accent1"/>
+          </a:effectRef>
+          <a:fontRef idx="minor">
+            <a:schemeClr val="lt1"/>
+          </a:fontRef>
+        </p:style>
+        <p:txBody>
+          <a:bodyPr rtlCol="0" anchor="ctr"/>
+          <a:lstStyle/>
+          <a:p>
+            <a:pPr algn="ctr"/>
+          </a:p>
+        </p:txBody>
+      </p:sp>
+      <p:sp>
+        <p:nvSpPr>
+          <p:cNvPr id="4" name="Rectangle 3"/>
+          <p:cNvSpPr/>
+          <p:nvPr/>
+        </p:nvSpPr>
+        <p:spPr>
+          <a:xfrm>
+            <a:off x="0" y="6510528"/>
+            <a:ext cx="12191695" cy="347472"/>
+          </a:xfrm>
+          <a:prstGeom prst="rect">
+            <a:avLst/>
+          </a:prstGeom>
+          <a:solidFill>
+            <a:srgbClr val="7F3F5A"/>
+          </a:solidFill>
+          <a:ln>
+            <a:noFill/>
+          </a:ln>
+        </p:spPr>
+        <p:style>
+          <a:lnRef idx="1">
+            <a:schemeClr val="accent1"/>
+          </a:lnRef>
+          <a:fillRef idx="3">
+            <a:schemeClr val="accent1"/>
+          </a:fillRef>
+          <a:effectRef idx="2">
+            <a:schemeClr val="accent1"/>
+          </a:effectRef>
+          <a:fontRef idx="minor">
+            <a:schemeClr val="lt1"/>
+          </a:fontRef>
+        </p:style>
+        <p:txBody>
+          <a:bodyPr rtlCol="0" anchor="ctr"/>
+          <a:lstStyle/>
+          <a:p>
+            <a:pPr algn="ctr"/>
+          </a:p>
+        </p:txBody>
+      </p:sp>
+      <p:sp>
+        <p:nvSpPr>
+          <p:cNvPr id="5" name="TextBox 4"/>
+          <p:cNvSpPr txBox="1"/>
+          <p:nvPr/>
+        </p:nvSpPr>
+        <p:spPr>
+          <a:xfrm>
+            <a:off x="365760" y="6528816"/>
+            <a:ext cx="9144000" cy="292608"/>
+          </a:xfrm>
+          <a:prstGeom prst="rect">
+            <a:avLst/>
+          </a:prstGeom>
+          <a:noFill/>
+        </p:spPr>
+        <p:txBody>
+          <a:bodyPr wrap="none">
+            <a:spAutoFit/>
+          </a:bodyPr>
+          <a:lstStyle/>
+          <a:p>
+            <a:r>
+              <a:rPr sz="1100">
+                <a:solidFill>
+                  <a:srgbClr val="FFFFFF"/>
+                </a:solidFill>
+                <a:latin typeface="Calibri"/>
+              </a:rPr>
+              <a:t>Pivoine &amp; Lilas  ·  Sciez / Léman  ·  Dimitri Jaille &amp; Mattieu Mouroux</a:t>
+            </a:r>
+          </a:p>
+        </p:txBody>
+      </p:sp>
+      <p:sp>
+        <p:nvSpPr>
+          <p:cNvPr id="6" name="TextBox 5"/>
+          <p:cNvSpPr txBox="1"/>
+          <p:nvPr/>
+        </p:nvSpPr>
+        <p:spPr>
+          <a:xfrm>
+            <a:off x="411480" y="256032"/>
+            <a:ext cx="11338560" cy="292608"/>
+          </a:xfrm>
+          <a:prstGeom prst="rect">
+            <a:avLst/>
+          </a:prstGeom>
+          <a:noFill/>
+        </p:spPr>
+        <p:txBody>
+          <a:bodyPr wrap="none">
+            <a:spAutoFit/>
+          </a:bodyPr>
+          <a:lstStyle/>
+          <a:p>
+            <a:r>
+              <a:rPr sz="1200" b="1">
+                <a:solidFill>
+                  <a:srgbClr val="BC6288"/>
+                </a:solidFill>
+                <a:latin typeface="Calibri"/>
+              </a:rPr>
+              <a:t>MAQUETTE</a:t>
+            </a:r>
+          </a:p>
+        </p:txBody>
+      </p:sp>
+      <p:sp>
+        <p:nvSpPr>
+          <p:cNvPr id="7" name="TextBox 6"/>
+          <p:cNvSpPr txBox="1"/>
+          <p:nvPr/>
+        </p:nvSpPr>
+        <p:spPr>
+          <a:xfrm>
+            <a:off x="411480" y="475488"/>
+            <a:ext cx="11338560" cy="502920"/>
+          </a:xfrm>
+          <a:prstGeom prst="rect">
+            <a:avLst/>
+          </a:prstGeom>
+          <a:noFill/>
+        </p:spPr>
+        <p:txBody>
+          <a:bodyPr wrap="none">
+            <a:spAutoFit/>
+          </a:bodyPr>
+          <a:lstStyle/>
+          <a:p>
+            <a:r>
+              <a:rPr sz="2800" b="1">
+                <a:solidFill>
+                  <a:srgbClr val="3A2A30"/>
+                </a:solidFill>
+                <a:latin typeface="Calibri"/>
+              </a:rPr>
+              <a:t>Connexion, vitrine admin, panier vide</a:t>
+            </a:r>
+          </a:p>
+        </p:txBody>
+      </p:sp>
+      <p:pic>
+        <p:nvPicPr>
+          <p:cNvPr id="8" name="Picture 7" descr="mockup-login.png"/>
+          <p:cNvPicPr>
+            <a:picLocks noChangeAspect="1"/>
+          </p:cNvPicPr>
+          <p:nvPr/>
+        </p:nvPicPr>
+        <p:blipFill>
+          <a:blip r:embed="rId2"/>
+          <a:stretch>
+            <a:fillRect/>
+          </a:stretch>
+        </p:blipFill>
+        <p:spPr>
+          <a:xfrm>
+            <a:off x="365760" y="1097280"/>
+            <a:ext cx="3383280" cy="4023360"/>
+          </a:xfrm>
+          <a:prstGeom prst="rect">
+            <a:avLst/>
+          </a:prstGeom>
+        </p:spPr>
+      </p:pic>
+      <p:sp>
+        <p:nvSpPr>
+          <p:cNvPr id="9" name="TextBox 8"/>
+          <p:cNvSpPr txBox="1"/>
+          <p:nvPr/>
+        </p:nvSpPr>
+        <p:spPr>
+          <a:xfrm>
+            <a:off x="365760" y="5166360"/>
+            <a:ext cx="3383280" cy="292608"/>
+          </a:xfrm>
+          <a:prstGeom prst="rect">
+            <a:avLst/>
+          </a:prstGeom>
+          <a:noFill/>
+        </p:spPr>
+        <p:txBody>
+          <a:bodyPr wrap="none">
+            <a:spAutoFit/>
+          </a:bodyPr>
+          <a:lstStyle/>
+          <a:p>
+            <a:pPr algn="ctr"/>
+            <a:r>
+              <a:rPr sz="1200" b="1">
+                <a:solidFill>
+                  <a:srgbClr val="BC6288"/>
+                </a:solidFill>
+                <a:latin typeface="Calibri"/>
+              </a:rPr>
+              <a:t>Connexion</a:t>
+            </a:r>
+          </a:p>
+        </p:txBody>
+      </p:sp>
+      <p:pic>
+        <p:nvPicPr>
+          <p:cNvPr id="10" name="Picture 9" descr="mockup-admin-vitrine.png"/>
+          <p:cNvPicPr>
+            <a:picLocks noChangeAspect="1"/>
+          </p:cNvPicPr>
+          <p:nvPr/>
+        </p:nvPicPr>
+        <p:blipFill>
+          <a:blip r:embed="rId3"/>
+          <a:stretch>
+            <a:fillRect/>
+          </a:stretch>
+        </p:blipFill>
+        <p:spPr>
+          <a:xfrm>
+            <a:off x="4160520" y="1097280"/>
+            <a:ext cx="3383280" cy="4023360"/>
+          </a:xfrm>
+          <a:prstGeom prst="rect">
+            <a:avLst/>
+          </a:prstGeom>
+        </p:spPr>
+      </p:pic>
+      <p:sp>
+        <p:nvSpPr>
+          <p:cNvPr id="11" name="TextBox 10"/>
+          <p:cNvSpPr txBox="1"/>
+          <p:nvPr/>
+        </p:nvSpPr>
+        <p:spPr>
+          <a:xfrm>
+            <a:off x="4160520" y="5166360"/>
+            <a:ext cx="3383280" cy="292608"/>
+          </a:xfrm>
+          <a:prstGeom prst="rect">
+            <a:avLst/>
+          </a:prstGeom>
+          <a:noFill/>
+        </p:spPr>
+        <p:txBody>
+          <a:bodyPr wrap="none">
+            <a:spAutoFit/>
+          </a:bodyPr>
+          <a:lstStyle/>
+          <a:p>
+            <a:pPr algn="ctr"/>
+            <a:r>
+              <a:rPr sz="1200" b="1">
+                <a:solidFill>
+                  <a:srgbClr val="BC6288"/>
+                </a:solidFill>
+                <a:latin typeface="Calibri"/>
+              </a:rPr>
+              <a:t>Vitrine admin</a:t>
+            </a:r>
+          </a:p>
+        </p:txBody>
+      </p:sp>
+      <p:pic>
+        <p:nvPicPr>
+          <p:cNvPr id="12" name="Picture 11" descr="mockup-panier-vide-mobile.png"/>
+          <p:cNvPicPr>
+            <a:picLocks noChangeAspect="1"/>
+          </p:cNvPicPr>
+          <p:nvPr/>
+        </p:nvPicPr>
+        <p:blipFill>
+          <a:blip r:embed="rId4"/>
+          <a:stretch>
+            <a:fillRect/>
+          </a:stretch>
+        </p:blipFill>
+        <p:spPr>
+          <a:xfrm>
+            <a:off x="7955279" y="1097280"/>
+            <a:ext cx="3017520" cy="4572000"/>
+          </a:xfrm>
+          <a:prstGeom prst="rect">
+            <a:avLst/>
+          </a:prstGeom>
+        </p:spPr>
+      </p:pic>
+      <p:sp>
+        <p:nvSpPr>
+          <p:cNvPr id="13" name="TextBox 12"/>
+          <p:cNvSpPr txBox="1"/>
+          <p:nvPr/>
+        </p:nvSpPr>
+        <p:spPr>
+          <a:xfrm>
+            <a:off x="7955279" y="5687568"/>
+            <a:ext cx="3017520" cy="292608"/>
+          </a:xfrm>
+          <a:prstGeom prst="rect">
+            <a:avLst/>
+          </a:prstGeom>
+          <a:noFill/>
+        </p:spPr>
+        <p:txBody>
+          <a:bodyPr wrap="none">
+            <a:spAutoFit/>
+          </a:bodyPr>
+          <a:lstStyle/>
+          <a:p>
+            <a:pPr algn="ctr"/>
+            <a:r>
+              <a:rPr sz="1200" b="1">
+                <a:solidFill>
+                  <a:srgbClr val="BC6288"/>
+                </a:solidFill>
+                <a:latin typeface="Calibri"/>
+              </a:rPr>
+              <a:t>Panier vide mobile</a:t>
+            </a:r>
+          </a:p>
+        </p:txBody>
+      </p:sp>
+    </p:spTree>
+  </p:cSld>
+  <p:clrMapOvr>
+    <a:masterClrMapping/>
+  </p:clrMapOvr>
+</p:sld>
+</file>
+
+<file path=ppt/slides/slide23.xml><?xml version="1.0" encoding="utf-8"?>
+<p:sld xmlns:a="http://schemas.openxmlformats.org/drawingml/2006/main" xmlns:p="http://schemas.openxmlformats.org/presentationml/2006/main" xmlns:r="http://schemas.openxmlformats.org/officeDocument/2006/relationships">
+  <p:cSld>
+    <p:spTree>
+      <p:nvGrpSpPr>
+        <p:cNvPr id="1" name=""/>
+        <p:cNvGrpSpPr/>
+        <p:nvPr/>
+      </p:nvGrpSpPr>
+      <p:grpSpPr/>
+      <p:sp>
+        <p:nvSpPr>
+          <p:cNvPr id="2" name="Rectangle 1"/>
+          <p:cNvSpPr/>
+          <p:nvPr/>
+        </p:nvSpPr>
+        <p:spPr>
+          <a:xfrm>
+            <a:off x="0" y="0"/>
+            <a:ext cx="12191695" cy="6858000"/>
+          </a:xfrm>
+          <a:prstGeom prst="rect">
+            <a:avLst/>
+          </a:prstGeom>
+          <a:solidFill>
+            <a:srgbClr val="FDFAF8"/>
+          </a:solidFill>
+          <a:ln>
+            <a:noFill/>
+          </a:ln>
+        </p:spPr>
+        <p:style>
+          <a:lnRef idx="1">
+            <a:schemeClr val="accent1"/>
+          </a:lnRef>
+          <a:fillRef idx="3">
+            <a:schemeClr val="accent1"/>
+          </a:fillRef>
+          <a:effectRef idx="2">
+            <a:schemeClr val="accent1"/>
+          </a:effectRef>
+          <a:fontRef idx="minor">
+            <a:schemeClr val="lt1"/>
+          </a:fontRef>
+        </p:style>
+        <p:txBody>
+          <a:bodyPr rtlCol="0" anchor="ctr"/>
+          <a:lstStyle/>
+          <a:p>
+            <a:pPr algn="ctr"/>
+          </a:p>
+        </p:txBody>
+      </p:sp>
+      <p:sp>
+        <p:nvSpPr>
+          <p:cNvPr id="3" name="Rectangle 2"/>
+          <p:cNvSpPr/>
+          <p:nvPr/>
+        </p:nvSpPr>
+        <p:spPr>
+          <a:xfrm>
+            <a:off x="0" y="0"/>
+            <a:ext cx="12191695" cy="109728"/>
+          </a:xfrm>
+          <a:prstGeom prst="rect">
+            <a:avLst/>
+          </a:prstGeom>
+          <a:solidFill>
+            <a:srgbClr val="BC6288"/>
+          </a:solidFill>
+          <a:ln>
+            <a:noFill/>
+          </a:ln>
+        </p:spPr>
+        <p:style>
+          <a:lnRef idx="1">
+            <a:schemeClr val="accent1"/>
+          </a:lnRef>
+          <a:fillRef idx="3">
+            <a:schemeClr val="accent1"/>
+          </a:fillRef>
+          <a:effectRef idx="2">
+            <a:schemeClr val="accent1"/>
+          </a:effectRef>
+          <a:fontRef idx="minor">
+            <a:schemeClr val="lt1"/>
+          </a:fontRef>
+        </p:style>
+        <p:txBody>
+          <a:bodyPr rtlCol="0" anchor="ctr"/>
+          <a:lstStyle/>
+          <a:p>
+            <a:pPr algn="ctr"/>
+          </a:p>
+        </p:txBody>
+      </p:sp>
+      <p:sp>
+        <p:nvSpPr>
+          <p:cNvPr id="4" name="Rectangle 3"/>
+          <p:cNvSpPr/>
+          <p:nvPr/>
+        </p:nvSpPr>
+        <p:spPr>
+          <a:xfrm>
+            <a:off x="0" y="6510528"/>
+            <a:ext cx="12191695" cy="347472"/>
+          </a:xfrm>
+          <a:prstGeom prst="rect">
+            <a:avLst/>
+          </a:prstGeom>
+          <a:solidFill>
+            <a:srgbClr val="7F3F5A"/>
+          </a:solidFill>
+          <a:ln>
+            <a:noFill/>
+          </a:ln>
+        </p:spPr>
+        <p:style>
+          <a:lnRef idx="1">
+            <a:schemeClr val="accent1"/>
+          </a:lnRef>
+          <a:fillRef idx="3">
+            <a:schemeClr val="accent1"/>
+          </a:fillRef>
+          <a:effectRef idx="2">
+            <a:schemeClr val="accent1"/>
+          </a:effectRef>
+          <a:fontRef idx="minor">
+            <a:schemeClr val="lt1"/>
+          </a:fontRef>
+        </p:style>
+        <p:txBody>
+          <a:bodyPr rtlCol="0" anchor="ctr"/>
+          <a:lstStyle/>
+          <a:p>
+            <a:pPr algn="ctr"/>
+          </a:p>
+        </p:txBody>
+      </p:sp>
+      <p:sp>
+        <p:nvSpPr>
+          <p:cNvPr id="5" name="TextBox 4"/>
+          <p:cNvSpPr txBox="1"/>
+          <p:nvPr/>
+        </p:nvSpPr>
+        <p:spPr>
+          <a:xfrm>
+            <a:off x="365760" y="6528816"/>
+            <a:ext cx="9144000" cy="292608"/>
+          </a:xfrm>
+          <a:prstGeom prst="rect">
+            <a:avLst/>
+          </a:prstGeom>
+          <a:noFill/>
+        </p:spPr>
+        <p:txBody>
+          <a:bodyPr wrap="none">
+            <a:spAutoFit/>
+          </a:bodyPr>
+          <a:lstStyle/>
+          <a:p>
+            <a:r>
+              <a:rPr sz="1100">
+                <a:solidFill>
+                  <a:srgbClr val="FFFFFF"/>
+                </a:solidFill>
+                <a:latin typeface="Calibri"/>
+              </a:rPr>
+              <a:t>Pivoine &amp; Lilas  ·  Sciez / Léman  ·  Dimitri Jaille &amp; Mattieu Mouroux</a:t>
+            </a:r>
+          </a:p>
+        </p:txBody>
+      </p:sp>
+      <p:sp>
+        <p:nvSpPr>
+          <p:cNvPr id="6" name="TextBox 5"/>
+          <p:cNvSpPr txBox="1"/>
+          <p:nvPr/>
+        </p:nvSpPr>
+        <p:spPr>
+          <a:xfrm>
+            <a:off x="411480" y="256032"/>
+            <a:ext cx="11338560" cy="292608"/>
+          </a:xfrm>
+          <a:prstGeom prst="rect">
+            <a:avLst/>
+          </a:prstGeom>
+          <a:noFill/>
+        </p:spPr>
+        <p:txBody>
+          <a:bodyPr wrap="none">
+            <a:spAutoFit/>
+          </a:bodyPr>
+          <a:lstStyle/>
+          <a:p>
+            <a:r>
+              <a:rPr sz="1200" b="1">
+                <a:solidFill>
+                  <a:srgbClr val="BC6288"/>
+                </a:solidFill>
+                <a:latin typeface="Calibri"/>
+              </a:rPr>
+              <a:t>CONCLUSION</a:t>
+            </a:r>
+          </a:p>
+        </p:txBody>
+      </p:sp>
+      <p:sp>
+        <p:nvSpPr>
+          <p:cNvPr id="7" name="TextBox 6"/>
+          <p:cNvSpPr txBox="1"/>
+          <p:nvPr/>
+        </p:nvSpPr>
+        <p:spPr>
+          <a:xfrm>
+            <a:off x="411480" y="475488"/>
+            <a:ext cx="11338560" cy="502920"/>
+          </a:xfrm>
+          <a:prstGeom prst="rect">
+            <a:avLst/>
+          </a:prstGeom>
+          <a:noFill/>
+        </p:spPr>
+        <p:txBody>
+          <a:bodyPr wrap="none">
+            <a:spAutoFit/>
+          </a:bodyPr>
+          <a:lstStyle/>
+          <a:p>
+            <a:r>
+              <a:rPr sz="2800" b="1">
+                <a:solidFill>
+                  <a:srgbClr val="3A2A30"/>
+                </a:solidFill>
+                <a:latin typeface="Calibri"/>
+              </a:rPr>
+              <a:t>A florist shop that takes money and can be explained</a:t>
+            </a:r>
+          </a:p>
+        </p:txBody>
+      </p:sp>
+      <p:sp>
+        <p:nvSpPr>
+          <p:cNvPr id="8" name="TextBox 7"/>
+          <p:cNvSpPr txBox="1"/>
+          <p:nvPr/>
+        </p:nvSpPr>
+        <p:spPr>
+          <a:xfrm>
+            <a:off x="411480" y="1097280"/>
+            <a:ext cx="11338560" cy="5029200"/>
+          </a:xfrm>
+          <a:prstGeom prst="rect">
+            <a:avLst/>
+          </a:prstGeom>
+          <a:noFill/>
+        </p:spPr>
+        <p:txBody>
+          <a:bodyPr wrap="square">
+            <a:spAutoFit/>
+          </a:bodyPr>
+          <a:lstStyle/>
+          <a:p>
+            <a:pPr>
+              <a:spcAft>
+                <a:spcPts val="800"/>
+              </a:spcAft>
+              <a:defRPr sz="1800">
+                <a:solidFill>
+                  <a:srgbClr val="3A2A30"/>
+                </a:solidFill>
+                <a:latin typeface="Calibri"/>
+              </a:defRPr>
+            </a:pPr>
+            <a:r>
+              <a:t>A customer can sign in, buy a photographed bouquet, pay or leave a deposit, subscribe, and track.</a:t>
+            </a:r>
+          </a:p>
+          <a:p>
+            <a:pPr>
+              <a:spcAft>
+                <a:spcPts val="800"/>
+              </a:spcAft>
+              <a:defRPr sz="1800">
+                <a:solidFill>
+                  <a:srgbClr val="3A2A30"/>
+                </a:solidFill>
+                <a:latin typeface="Calibri"/>
+              </a:defRPr>
+            </a:pPr>
+            <a:r>
+              <a:t>The florist manages catalog, vitrine, and a printable TTC invoice — not a fake 20 % TVA.</a:t>
+            </a:r>
+          </a:p>
+          <a:p>
+            <a:pPr>
+              <a:spcAft>
+                <a:spcPts val="800"/>
+              </a:spcAft>
+              <a:defRPr sz="1800">
+                <a:solidFill>
+                  <a:srgbClr val="3A2A30"/>
+                </a:solidFill>
+                <a:latin typeface="Calibri"/>
+              </a:defRPr>
+            </a:pPr>
+            <a:r>
+              <a:t>Gaps from the original Wix spec are written down. 80 tests. Secrets stay out of Git.</a:t>
+            </a:r>
+          </a:p>
+          <a:p>
+            <a:pPr>
+              <a:spcAft>
+                <a:spcPts val="800"/>
+              </a:spcAft>
+              <a:defRPr sz="1800">
+                <a:solidFill>
+                  <a:srgbClr val="3A2A30"/>
+                </a:solidFill>
+                <a:latin typeface="Calibri"/>
+              </a:defRPr>
+            </a:pPr>
+            <a:r>
+              <a:t>Next slice: operations (delivery, email, hosting), not another visual pass.</a:t>
+            </a:r>
+          </a:p>
+        </p:txBody>
+      </p:sp>
+    </p:spTree>
+  </p:cSld>
+  <p:clrMapOvr>
+    <a:masterClrMapping/>
+  </p:clrMapOvr>
+</p:sld>
+</file>
+
+<file path=ppt/slides/slide24.xml><?xml version="1.0" encoding="utf-8"?>
 <p:sld xmlns:a="http://schemas.openxmlformats.org/drawingml/2006/main" xmlns:p="http://schemas.openxmlformats.org/presentationml/2006/main" xmlns:r="http://schemas.openxmlformats.org/officeDocument/2006/relationships">
   <p:cSld>
     <p:spTree>

--- a/docs/presentation/Pivoine-Lilas.pptx
+++ b/docs/presentation/Pivoine-Lilas.pptx
@@ -3276,7 +3276,7 @@
               </a:defRPr>
             </a:pPr>
             <a:r>
-              <a:t>Open (honest): no email send, no customer password-change form, reviews API unmounted, cart in localStorage, unused prices table, no public production host, JWT in localStorage (XSS residual), invoices are TTC demo docs.</a:t>
+              <a:t>Open (honest): reviews API unmounted, cart in localStorage, unused prices table, no public production host, JWT in localStorage (XSS residual), invoices are TTC demo docs. Verification/reset use classroom demo_code unless MAIL_SERVER is set.</a:t>
             </a:r>
           </a:p>
           <a:p>
@@ -3853,7 +3853,7 @@
               </a:defRPr>
             </a:pPr>
             <a:r>
-              <a:t>CNIL: 5 failed logins → 429 for 15 minutes. Still missing: customer password-change form, mail verify.</a:t>
+              <a:t>CNIL: 5 failed logins → 429 for 15 minutes. Email/SMS verify + customer password change ship (6-digit code).</a:t>
             </a:r>
           </a:p>
         </p:txBody>
@@ -4023,7 +4023,7 @@
                 </a:solidFill>
                 <a:latin typeface="Arial"/>
               </a:rPr>
-              <a:t>Testing — 86 tests OK</a:t>
+              <a:t>Testing — 92 tests OK</a:t>
             </a:r>
           </a:p>
         </p:txBody>
@@ -6557,7 +6557,7 @@
               </a:defRPr>
             </a:pPr>
             <a:r>
-              <a:t>Gaps from the original Wix spec are written down. 86 tests. Secrets stay out of Git. HTTPS and CNIL lockout ship.</a:t>
+              <a:t>Gaps from the original Wix spec are written down. 92 tests. Secrets stay out of Git. HTTPS, CNIL lockout, email/SMS verify and password change ship.</a:t>
             </a:r>
           </a:p>
           <a:p>
@@ -6573,7 +6573,7 @@
               </a:defRPr>
             </a:pPr>
             <a:r>
-              <a:t>Still not 100 % of Holberton mandatory product items: email/SMS verification and a customer password-change form.</a:t>
+              <a:t>Wix leftovers still cut: click-and-collect, geo, homepage CMS, fiscal HT/TVA.</a:t>
             </a:r>
           </a:p>
           <a:p>
@@ -6781,7 +6781,7 @@
               </a:defRPr>
             </a:pPr>
             <a:r>
-              <a:t>Evidence: github.com/Issercio/Demo-day · ./run-tests.sh (86 tests).</a:t>
+              <a:t>Evidence: github.com/Issercio/Demo-day · ./run-tests.sh (92 tests).</a:t>
             </a:r>
           </a:p>
           <a:p>
@@ -7156,7 +7156,7 @@
               </a:defRPr>
             </a:pPr>
             <a:r>
-              <a:t>Payments: test cards or Stripe API. Photos on disk. unittest + coverage (86 tests).</a:t>
+              <a:t>Payments: test cards or Stripe API. Photos on disk. unittest + coverage (92 tests).</a:t>
             </a:r>
           </a:p>
           <a:p>
@@ -7951,7 +7951,7 @@
                 <a:gridCol w="3779520"/>
                 <a:gridCol w="3779520"/>
               </a:tblGrid>
-              <a:tr h="640080">
+              <a:tr h="853440">
                 <a:tc>
                   <a:txBody>
                     <a:bodyPr/>
@@ -8025,7 +8025,7 @@
                   </a:tcPr>
                 </a:tc>
               </a:tr>
-              <a:tr h="640080">
+              <a:tr h="853440">
                 <a:tc>
                   <a:txBody>
                     <a:bodyPr/>
@@ -8040,7 +8040,7 @@
                         </a:defRPr>
                       </a:pPr>
                       <a:r>
-                        <a:t>Email verification / reset mail</a:t>
+                        <a:t>Click-and-collect slot</a:t>
                       </a:r>
                     </a:p>
                   </a:txBody>
@@ -8060,7 +8060,7 @@
                         </a:defRPr>
                       </a:pPr>
                       <a:r>
-                        <a:t>No mail provider in class</a:t>
+                        <a:t>Time-box</a:t>
                       </a:r>
                     </a:p>
                   </a:txBody>
@@ -8080,14 +8080,14 @@
                         </a:defRPr>
                       </a:pPr>
                       <a:r>
-                        <a:t>UI pages only</a:t>
+                        <a:t>Paid order, no window</a:t>
                       </a:r>
                     </a:p>
                   </a:txBody>
                   <a:tcPr/>
                 </a:tc>
               </a:tr>
-              <a:tr h="640080">
+              <a:tr h="853440">
                 <a:tc>
                   <a:txBody>
                     <a:bodyPr/>
@@ -8102,7 +8102,7 @@
                         </a:defRPr>
                       </a:pPr>
                       <a:r>
-                        <a:t>Password change by customer</a:t>
+                        <a:t>Delivery zones</a:t>
                       </a:r>
                     </a:p>
                   </a:txBody>
@@ -8126,7 +8126,7 @@
                         </a:defRPr>
                       </a:pPr>
                       <a:r>
-                        <a:t>PUT /users is admin-only</a:t>
+                        <a:t>No geo table</a:t>
                       </a:r>
                     </a:p>
                   </a:txBody>
@@ -8150,7 +8150,7 @@
                         </a:defRPr>
                       </a:pPr>
                       <a:r>
-                        <a:t>Hash exists, no form</a:t>
+                        <a:t>Not modelled</a:t>
                       </a:r>
                     </a:p>
                   </a:txBody>
@@ -8161,7 +8161,7 @@
                   </a:tcPr>
                 </a:tc>
               </a:tr>
-              <a:tr h="640080">
+              <a:tr h="853440">
                 <a:tc>
                   <a:txBody>
                     <a:bodyPr/>
@@ -8176,7 +8176,7 @@
                         </a:defRPr>
                       </a:pPr>
                       <a:r>
-                        <a:t>Click-and-collect slot</a:t>
+                        <a:t>Homepage CMS</a:t>
                       </a:r>
                     </a:p>
                   </a:txBody>
@@ -8196,7 +8196,7 @@
                         </a:defRPr>
                       </a:pPr>
                       <a:r>
-                        <a:t>Time-box</a:t>
+                        <a:t>Vitrine is the shop window</a:t>
                       </a:r>
                     </a:p>
                   </a:txBody>
@@ -8216,14 +8216,14 @@
                         </a:defRPr>
                       </a:pPr>
                       <a:r>
-                        <a:t>Paid order, no window</a:t>
+                        <a:t>accueil is a template</a:t>
                       </a:r>
                     </a:p>
                   </a:txBody>
                   <a:tcPr/>
                 </a:tc>
               </a:tr>
-              <a:tr h="640080">
+              <a:tr h="853440">
                 <a:tc>
                   <a:txBody>
                     <a:bodyPr/>
@@ -8238,7 +8238,7 @@
                         </a:defRPr>
                       </a:pPr>
                       <a:r>
-                        <a:t>Delivery zones</a:t>
+                        <a:t>HT + TVA invoice</a:t>
                       </a:r>
                     </a:p>
                   </a:txBody>
@@ -8262,7 +8262,7 @@
                         </a:defRPr>
                       </a:pPr>
                       <a:r>
-                        <a:t>No geo table</a:t>
+                        <a:t>CGV has no VAT regime</a:t>
                       </a:r>
                     </a:p>
                   </a:txBody>
@@ -8286,7 +8286,7 @@
                         </a:defRPr>
                       </a:pPr>
                       <a:r>
-                        <a:t>Not modelled</a:t>
+                        <a:t>TTC demo FAC only</a:t>
                       </a:r>
                     </a:p>
                   </a:txBody>
@@ -8297,143 +8297,7 @@
                   </a:tcPr>
                 </a:tc>
               </a:tr>
-              <a:tr h="640080">
-                <a:tc>
-                  <a:txBody>
-                    <a:bodyPr/>
-                    <a:lstStyle/>
-                    <a:p>
-                      <a:pPr>
-                        <a:defRPr sz="1200">
-                          <a:solidFill>
-                            <a:srgbClr val="3A2A30"/>
-                          </a:solidFill>
-                          <a:latin typeface="Arial"/>
-                        </a:defRPr>
-                      </a:pPr>
-                      <a:r>
-                        <a:t>Homepage CMS</a:t>
-                      </a:r>
-                    </a:p>
-                  </a:txBody>
-                  <a:tcPr/>
-                </a:tc>
-                <a:tc>
-                  <a:txBody>
-                    <a:bodyPr/>
-                    <a:lstStyle/>
-                    <a:p>
-                      <a:pPr>
-                        <a:defRPr sz="1200">
-                          <a:solidFill>
-                            <a:srgbClr val="3A2A30"/>
-                          </a:solidFill>
-                          <a:latin typeface="Arial"/>
-                        </a:defRPr>
-                      </a:pPr>
-                      <a:r>
-                        <a:t>Vitrine is the shop window</a:t>
-                      </a:r>
-                    </a:p>
-                  </a:txBody>
-                  <a:tcPr/>
-                </a:tc>
-                <a:tc>
-                  <a:txBody>
-                    <a:bodyPr/>
-                    <a:lstStyle/>
-                    <a:p>
-                      <a:pPr>
-                        <a:defRPr sz="1200">
-                          <a:solidFill>
-                            <a:srgbClr val="3A2A30"/>
-                          </a:solidFill>
-                          <a:latin typeface="Arial"/>
-                        </a:defRPr>
-                      </a:pPr>
-                      <a:r>
-                        <a:t>accueil is a template</a:t>
-                      </a:r>
-                    </a:p>
-                  </a:txBody>
-                  <a:tcPr/>
-                </a:tc>
-              </a:tr>
-              <a:tr h="640080">
-                <a:tc>
-                  <a:txBody>
-                    <a:bodyPr/>
-                    <a:lstStyle/>
-                    <a:p>
-                      <a:pPr>
-                        <a:defRPr sz="1200">
-                          <a:solidFill>
-                            <a:srgbClr val="3A2A30"/>
-                          </a:solidFill>
-                          <a:latin typeface="Arial"/>
-                        </a:defRPr>
-                      </a:pPr>
-                      <a:r>
-                        <a:t>HT + TVA invoice</a:t>
-                      </a:r>
-                    </a:p>
-                  </a:txBody>
-                  <a:tcPr>
-                    <a:solidFill>
-                      <a:srgbClr val="F8F5F2"/>
-                    </a:solidFill>
-                  </a:tcPr>
-                </a:tc>
-                <a:tc>
-                  <a:txBody>
-                    <a:bodyPr/>
-                    <a:lstStyle/>
-                    <a:p>
-                      <a:pPr>
-                        <a:defRPr sz="1200">
-                          <a:solidFill>
-                            <a:srgbClr val="3A2A30"/>
-                          </a:solidFill>
-                          <a:latin typeface="Arial"/>
-                        </a:defRPr>
-                      </a:pPr>
-                      <a:r>
-                        <a:t>CGV has no VAT regime</a:t>
-                      </a:r>
-                    </a:p>
-                  </a:txBody>
-                  <a:tcPr>
-                    <a:solidFill>
-                      <a:srgbClr val="F8F5F2"/>
-                    </a:solidFill>
-                  </a:tcPr>
-                </a:tc>
-                <a:tc>
-                  <a:txBody>
-                    <a:bodyPr/>
-                    <a:lstStyle/>
-                    <a:p>
-                      <a:pPr>
-                        <a:defRPr sz="1200">
-                          <a:solidFill>
-                            <a:srgbClr val="3A2A30"/>
-                          </a:solidFill>
-                          <a:latin typeface="Arial"/>
-                        </a:defRPr>
-                      </a:pPr>
-                      <a:r>
-                        <a:t>TTC demo FAC only</a:t>
-                      </a:r>
-                    </a:p>
-                  </a:txBody>
-                  <a:tcPr>
-                    <a:solidFill>
-                      <a:srgbClr val="F8F5F2"/>
-                    </a:solidFill>
-                  </a:tcPr>
-                </a:tc>
-              </a:tr>
-              <a:tr h="640080">
+              <a:tr h="853440">
                 <a:tc>
                   <a:txBody>
                     <a:bodyPr/>
@@ -8571,7 +8435,7 @@
               </a:defRPr>
             </a:pPr>
             <a:r>
-              <a:t>Must: auth, catalog+photos, isolated cart, server checkout, admin guard, florist invoice/prep, HTTPS, CNIL lockout.</a:t>
+              <a:t>Must: auth, catalog+photos, isolated cart, server checkout, admin guard, florist invoice/prep, HTTPS, CNIL lockout, email/SMS verify, customer password change.</a:t>
             </a:r>
           </a:p>
           <a:p>
@@ -8619,7 +8483,7 @@
               </a:defRPr>
             </a:pPr>
             <a:r>
-              <a:t>Won’t: native app, chat, AI, 2FA, OAuth, email verify, customer password form, geo, fiscal TVA.</a:t>
+              <a:t>Won’t: native app, chat, AI, 2FA, OAuth, geo, fiscal TVA.</a:t>
             </a:r>
           </a:p>
           <a:p>

--- a/docs/presentation/Pivoine-Lilas.pptx
+++ b/docs/presentation/Pivoine-Lilas.pptx
@@ -4948,7 +4948,7 @@
                         </a:defRPr>
                       </a:pPr>
                       <a:r>
-                        <a:t>Backend lead</a:t>
+                        <a:t>Backend 50 %</a:t>
                       </a:r>
                     </a:p>
                   </a:txBody>
@@ -4968,7 +4968,7 @@
                         </a:defRPr>
                       </a:pPr>
                       <a:r>
-                        <a:t>API, SQLAlchemy, JWT, checkout, tests, HTTPS, lockout</a:t>
+                        <a:t>All API, JWT, checkout, tests, HTTPS, lockout</a:t>
                       </a:r>
                     </a:p>
                   </a:txBody>
@@ -5014,7 +5014,7 @@
                         </a:defRPr>
                       </a:pPr>
                       <a:r>
-                        <a:t>Frontend &amp; Demo Day</a:t>
+                        <a:t>Frontend + database 50 %</a:t>
                       </a:r>
                     </a:p>
                   </a:txBody>
@@ -5038,7 +5038,7 @@
                         </a:defRPr>
                       </a:pPr>
                       <a:r>
-                        <a:t>Jinja/CSS/JS, stories, deck, live demo</a:t>
+                        <a:t>All Jinja/CSS/JS, models, schema, seed, deck</a:t>
                       </a:r>
                     </a:p>
                   </a:txBody>
@@ -6765,7 +6765,7 @@
               </a:defRPr>
             </a:pPr>
             <a:r>
-              <a:t>Decisions: Mattieu on UI copy; Dimitri on money/auth. Cuts (email, geo, HT/TVA) are written as missing stories — never hidden.</a:t>
+              <a:t>Split 50/50: Dimitri = entire backend. Mattieu = entire frontend and entire database.</a:t>
             </a:r>
           </a:p>
           <a:p>

--- a/docs/presentation/Pivoine-Lilas.pptx
+++ b/docs/presentation/Pivoine-Lilas.pptx
@@ -7124,7 +7124,7 @@
               </a:defRPr>
             </a:pPr>
             <a:r>
-              <a:t>Frontend: Jinja2 + vanilla JS, custom CSS (florist pink), localStorage cart per account.</a:t>
+              <a:t>Frontend: Jinja2 + vanilla JS, custom CSS (florist pink), localStorage cart per account (Mattieu, 50 %).</a:t>
             </a:r>
           </a:p>
           <a:p>
@@ -7140,7 +7140,23 @@
               </a:defRPr>
             </a:pPr>
             <a:r>
-              <a:t>Backend: Flask 3 + RESTX Swagger, SQLAlchemy 2 Numeric money, JWT HS256, roles from DB.</a:t>
+              <a:t>Database: SQLAlchemy models, SQLite/PostgreSQL, seed, vitrine tables (Mattieu, same 50 %).</a:t>
+            </a:r>
+          </a:p>
+          <a:p>
+            <a:pPr>
+              <a:spcAft>
+                <a:spcPts val="800"/>
+              </a:spcAft>
+              <a:defRPr sz="1700">
+                <a:solidFill>
+                  <a:srgbClr val="3A2A30"/>
+                </a:solidFill>
+                <a:latin typeface="Arial"/>
+              </a:defRPr>
+            </a:pPr>
+            <a:r>
+              <a:t>Backend: Flask 3 + RESTX Swagger, JWT HS256, Decimal checkout, tests, HTTPS, lockout (Dimitri, 50 %).</a:t>
             </a:r>
           </a:p>
           <a:p>
